--- a/cursos/recursos/arbitro-nacional/12-ajedrez-relampago-cuando-el-arbitro-decide-sin-que-nadie-reclame.pptx
+++ b/cursos/recursos/arbitro-nacional/12-ajedrez-relampago-cuando-el-arbitro-decide-sin-que-nadie-reclame.pptx
@@ -3712,7 +3712,7 @@
                 </a:solidFill>
                 <a:latin typeface="Calibri"/>
               </a:rPr>
-              <a:t>Se juega a ritmo relámpago cuando todo el tiempo disponible es menor a 10 minutos por jugador (art. B.1). Con árbitro presente junto a cada tablero (formato habitual en finales de torneo o exhibiciones), el artículo B.2 le da al árbitro la potestad de fallar directamente sobre jugadas ilegales o caídas de bandera, sin esperar el reclamo de ningún jugador — es la diferencia de fondo con el resto del reglamento, donde casi todo depende de que alguien reclame.</a:t>
+              <a:t>Se juega a ritmo relámpago cuando todo el tiempo disponible es menor a 10 minutos por jugador (art. B.1). Con árbitro presente junto a cada tablero, cumpliendo las Reglas de Competencia (art. B.2: un árbitro por partida, con registro de la partida), rige el deber general de intervenir sin esperar reclamo que ya tienen todos los árbitros del reglamento (art. 12.1, 7.5.1): quien está mirando ESA mesa falla directamente sobre jugadas ilegales o caídas de bandera, sin necesitar que ningún jugador reclame.</a:t>
             </a:r>
           </a:p>
         </p:txBody>
@@ -3955,7 +3955,7 @@
                 </a:solidFill>
                 <a:latin typeface="Calibri"/>
               </a:rPr>
-              <a:t>Sin árbitro junto a cada tablero, se vuelve al procedimiento de rápidas: el rival reclama y prueba la falta antes de hacer su propia siguiente jugada. Un reclamo hecho DESPUÉS de mover ya no vale — en relámpago el margen para reclamar es más corto que en cualquier otro ritmo, y explicarlo antes de la ronda evita discusiones a mitad de partida.</a:t>
+              <a:t>Sin árbitro junto a cada tablero, el propio apéndice B remite (art. B.3) al mismo procedimiento del A.5 de rápidas: el rival reclama y prueba la falta antes de hacer su propia siguiente jugada. Un reclamo hecho DESPUÉS de mover ya no vale — la regla es idéntica a la de rápidas, lo que cambia en relámpago es que, con jugadas de segundos, ese margen se vive mucho más corto en la práctica, y explicarlo antes de la ronda evita discusiones a mitad de partida.</a:t>
             </a:r>
           </a:p>
         </p:txBody>
@@ -4198,7 +4198,7 @@
                 </a:solidFill>
                 <a:latin typeface="Calibri"/>
               </a:rPr>
-              <a:t>La caída de bandera en relámpago sigue el mismo criterio de material insuficiente del artículo 6.9 y A.4.2 — no cambia por ser el ritmo más rápido, lo que cambia es quién puede fallarlo y con qué margen de tiempo para reclamar.</a:t>
+              <a:t>La caída de bandera en relámpago sigue el mismo criterio de material insuficiente del artículo 6.9, que el A.5.3 repite para cuando no hay árbitro dedicado en la mesa — no cambia por ser el ritmo más rápido, lo que cambia es quién puede fallarlo y con qué margen de tiempo para reclamar.</a:t>
             </a:r>
           </a:p>
         </p:txBody>
